--- a/Courses/145060/units/unit-02-selection-boolean-logic/04-slides/exports/MCCTC_145060_Slides_W05_FlatteningNesting.pptx
+++ b/Courses/145060/units/unit-02-selection-boolean-logic/04-slides/exports/MCCTC_145060_Slides_W05_FlatteningNesting.pptx
@@ -706,7 +706,7 @@
           <a:p>
             <a:r>
               <a:rPr lang="en-US" dirty="0"/>
-              <a:t>Build 1 is your Decision Engine. Before you add anything, look at every place you nested. For each one, name which of the four cases it is. If your nesting is a tree, keep it and say so in a comment. If it is a pyramid of requirements, flatten it and prove the outputs did not change. Build 2 is Gate 2. An AI wrote a program that checks whether someone is eligible for something. It is well formatted and confident, and one of its five defects sits exactly on a boundary.</a:t>
+              <a:t>Build 1 is your Decision Engine. Before you add anything, look at every place you nested. For each one, name which of the four cases it is. If your nesting is a tree, keep it and say so in a comment. If it is a pyramid of requirements, flatten it and prove the outputs did not change. Build 2 is still your engine. Run it once for every row of your decision table, typing exactly what the row says, and mark each row match or no match. Fix a mismatch, run the row again, and commit. Tomorrow is Gate 2. An AI wrote a program that checks whether someone is eligible for something. It is well formatted and confident, and one of its five defects sits exactly on a boundary.</a:t>
             </a:r>
             <a:endParaRPr lang="en-US" dirty="0"/>
           </a:p>
@@ -1941,7 +1941,7 @@
         </p:nvSpPr>
         <p:spPr>
           <a:xfrm>
-            <a:off x="661475" y="1924050"/>
+            <a:off x="661475" y="1751608"/>
             <a:ext cx="10868745" cy="590649"/>
           </a:xfrm>
           <a:prstGeom prst="rect">
@@ -1983,7 +1983,7 @@
         </p:nvSpPr>
         <p:spPr>
           <a:xfrm>
-            <a:off x="661475" y="3010793"/>
+            <a:off x="661475" y="2838351"/>
             <a:ext cx="5203794" cy="1587698"/>
           </a:xfrm>
           <a:prstGeom prst="roundRect">
@@ -2005,7 +2005,7 @@
         </p:nvSpPr>
         <p:spPr>
           <a:xfrm>
-            <a:off x="888283" y="3199805"/>
+            <a:off x="888283" y="3027363"/>
             <a:ext cx="4750177" cy="1209675"/>
           </a:xfrm>
           <a:prstGeom prst="rect">
@@ -2109,7 +2109,7 @@
         </p:nvSpPr>
         <p:spPr>
           <a:xfrm>
-            <a:off x="6332776" y="3010793"/>
+            <a:off x="6332776" y="2838351"/>
             <a:ext cx="5203794" cy="680442"/>
           </a:xfrm>
           <a:prstGeom prst="roundRect">
@@ -2131,7 +2131,7 @@
         </p:nvSpPr>
         <p:spPr>
           <a:xfrm>
-            <a:off x="6559584" y="3199805"/>
+            <a:off x="6559584" y="3027363"/>
             <a:ext cx="5359762" cy="302419"/>
           </a:xfrm>
           <a:prstGeom prst="rect">
@@ -2167,7 +2167,97 @@
       </p:sp>
       <p:sp>
         <p:nvSpPr>
-          <p:cNvPr id="7" name="Text 5"/>
+          <p:cNvPr id="7" name="Shape 5"/>
+          <p:cNvSpPr/>
+          <p:nvPr/>
+        </p:nvSpPr>
+        <p:spPr>
+          <a:xfrm>
+            <a:off x="6332776" y="3731419"/>
+            <a:ext cx="5203794" cy="1039416"/>
+          </a:xfrm>
+          <a:prstGeom prst="roundRect">
+            <a:avLst>
+              <a:gd name="adj" fmla="val 7638"/>
+            </a:avLst>
+          </a:prstGeom>
+          <a:solidFill>
+            <a:srgbClr val="FFB3B4"/>
+          </a:solidFill>
+          <a:ln/>
+        </p:spPr>
+      </p:sp>
+      <p:pic>
+        <p:nvPicPr>
+          <p:cNvPr id="8" name="Image 0" descr="preencoded.png">    </p:cNvPr>
+          <p:cNvPicPr>
+            <a:picLocks noChangeAspect="1"/>
+          </p:cNvPicPr>
+          <p:nvPr/>
+        </p:nvPicPr>
+        <p:blipFill>
+          <a:blip r:embed="rId1"/>
+          <a:stretch>
+            <a:fillRect/>
+          </a:stretch>
+        </p:blipFill>
+        <p:spPr>
+          <a:xfrm>
+            <a:off x="6521783" y="4018161"/>
+            <a:ext cx="236234" cy="189012"/>
+          </a:xfrm>
+          <a:prstGeom prst="rect">
+            <a:avLst/>
+          </a:prstGeom>
+        </p:spPr>
+      </p:pic>
+      <p:sp>
+        <p:nvSpPr>
+          <p:cNvPr id="9" name="Text 6"/>
+          <p:cNvSpPr/>
+          <p:nvPr/>
+        </p:nvSpPr>
+        <p:spPr>
+          <a:xfrm>
+            <a:off x="6947024" y="3948708"/>
+            <a:ext cx="4400539" cy="604838"/>
+          </a:xfrm>
+          <a:prstGeom prst="rect">
+            <a:avLst/>
+          </a:prstGeom>
+          <a:noFill/>
+          <a:ln/>
+        </p:spPr>
+        <p:txBody>
+          <a:bodyPr wrap="square" lIns="0" tIns="0" rIns="0" bIns="0" rtlCol="0" anchor="t">
+            <a:normAutofit/>
+          </a:bodyPr>
+          <a:lstStyle/>
+          <a:p>
+            <a:pPr algn="l" indent="0" marL="0">
+              <a:lnSpc>
+                <a:spcPct val="133000"/>
+              </a:lnSpc>
+              <a:buNone/>
+            </a:pPr>
+            <a:r>
+              <a:rPr lang="en-US" sz="1450" dirty="0">
+                <a:solidFill>
+                  <a:srgbClr val="000000"/>
+                </a:solidFill>
+                <a:latin typeface="Roboto Condensed" pitchFamily="34" charset="0"/>
+                <a:ea typeface="Roboto Condensed" pitchFamily="34" charset="-122"/>
+                <a:cs typeface="Roboto Condensed" pitchFamily="34" charset="-120"/>
+              </a:rPr>
+              <a:t>An unexpected indent produces an error before your program runs.</a:t>
+            </a:r>
+            <a:endParaRPr lang="en-US" sz="1450" dirty="0"/>
+          </a:p>
+        </p:txBody>
+      </p:sp>
+      <p:sp>
+        <p:nvSpPr>
+          <p:cNvPr id="10" name="Text 7"/>
           <p:cNvSpPr/>
           <p:nvPr/>
         </p:nvSpPr>
@@ -2248,7 +2338,7 @@
         </p:blipFill>
         <p:spPr>
           <a:xfrm>
-            <a:off x="0" y="0"/>
+            <a:off x="7619809" y="0"/>
             <a:ext cx="4571886" cy="6858000"/>
           </a:xfrm>
           <a:prstGeom prst="rect">
@@ -2264,8 +2354,8 @@
         </p:nvSpPr>
         <p:spPr>
           <a:xfrm>
-            <a:off x="5233360" y="595511"/>
-            <a:ext cx="6296860" cy="1181298"/>
+            <a:off x="661475" y="550565"/>
+            <a:ext cx="6296860" cy="1144389"/>
           </a:xfrm>
           <a:prstGeom prst="rect">
             <a:avLst/>
@@ -2286,7 +2376,7 @@
               <a:buNone/>
             </a:pPr>
             <a:r>
-              <a:rPr lang="en-US" sz="3700" b="1" dirty="0">
+              <a:rPr lang="en-US" sz="3600" b="1" dirty="0">
                 <a:solidFill>
                   <a:srgbClr val="111111"/>
                 </a:solidFill>
@@ -2296,7 +2386,7 @@
               </a:rPr>
               <a:t>What you are about to build</a:t>
             </a:r>
-            <a:endParaRPr lang="en-US" sz="3700" dirty="0"/>
+            <a:endParaRPr lang="en-US" sz="3600" dirty="0"/>
           </a:p>
         </p:txBody>
       </p:sp>
@@ -2308,8 +2398,8 @@
         </p:nvSpPr>
         <p:spPr>
           <a:xfrm>
-            <a:off x="5233360" y="2060277"/>
-            <a:ext cx="378014" cy="236240"/>
+            <a:off x="661475" y="1960959"/>
+            <a:ext cx="366207" cy="228798"/>
           </a:xfrm>
           <a:prstGeom prst="rect">
             <a:avLst/>
@@ -2328,7 +2418,7 @@
               <a:buNone/>
             </a:pPr>
             <a:r>
-              <a:rPr lang="en-US" sz="1450" dirty="0">
+              <a:rPr lang="en-US" sz="1400" dirty="0">
                 <a:solidFill>
                   <a:srgbClr val="1C1C1C"/>
                 </a:solidFill>
@@ -2338,7 +2428,7 @@
               </a:rPr>
               <a:t>01</a:t>
             </a:r>
-            <a:endParaRPr lang="en-US" sz="1450" dirty="0"/>
+            <a:endParaRPr lang="en-US" sz="1400" dirty="0"/>
           </a:p>
         </p:txBody>
       </p:sp>
@@ -2350,7 +2440,7 @@
         </p:nvSpPr>
         <p:spPr>
           <a:xfrm>
-            <a:off x="5233360" y="2356148"/>
+            <a:off x="661475" y="2246709"/>
             <a:ext cx="6296860" cy="25400"/>
           </a:xfrm>
           <a:prstGeom prst="rect">
@@ -2370,8 +2460,8 @@
         </p:nvSpPr>
         <p:spPr>
           <a:xfrm>
-            <a:off x="5233360" y="2501404"/>
-            <a:ext cx="6296860" cy="295275"/>
+            <a:off x="661475" y="2388989"/>
+            <a:ext cx="6296860" cy="286048"/>
           </a:xfrm>
           <a:prstGeom prst="rect">
             <a:avLst/>
@@ -2390,7 +2480,7 @@
               <a:buNone/>
             </a:pPr>
             <a:r>
-              <a:rPr lang="en-US" sz="1850" b="1" dirty="0">
+              <a:rPr lang="en-US" sz="1800" b="1" dirty="0">
                 <a:solidFill>
                   <a:srgbClr val="1C1C1C"/>
                 </a:solidFill>
@@ -2400,7 +2490,7 @@
               </a:rPr>
               <a:t>Build 1: Decision Engine, keep building</a:t>
             </a:r>
-            <a:endParaRPr lang="en-US" sz="1850" dirty="0"/>
+            <a:endParaRPr lang="en-US" sz="1800" dirty="0"/>
           </a:p>
         </p:txBody>
       </p:sp>
@@ -2412,8 +2502,8 @@
         </p:nvSpPr>
         <p:spPr>
           <a:xfrm>
-            <a:off x="5233360" y="3127375"/>
-            <a:ext cx="378014" cy="236240"/>
+            <a:off x="661475" y="2989659"/>
+            <a:ext cx="366207" cy="228798"/>
           </a:xfrm>
           <a:prstGeom prst="rect">
             <a:avLst/>
@@ -2432,7 +2522,7 @@
               <a:buNone/>
             </a:pPr>
             <a:r>
-              <a:rPr lang="en-US" sz="1450" dirty="0">
+              <a:rPr lang="en-US" sz="1400" dirty="0">
                 <a:solidFill>
                   <a:srgbClr val="1C1C1C"/>
                 </a:solidFill>
@@ -2442,7 +2532,7 @@
               </a:rPr>
               <a:t>02</a:t>
             </a:r>
-            <a:endParaRPr lang="en-US" sz="1450" dirty="0"/>
+            <a:endParaRPr lang="en-US" sz="1400" dirty="0"/>
           </a:p>
         </p:txBody>
       </p:sp>
@@ -2454,7 +2544,7 @@
         </p:nvSpPr>
         <p:spPr>
           <a:xfrm>
-            <a:off x="5233360" y="3423245"/>
+            <a:off x="661475" y="3275409"/>
             <a:ext cx="6296860" cy="25400"/>
           </a:xfrm>
           <a:prstGeom prst="rect">
@@ -2474,8 +2564,8 @@
         </p:nvSpPr>
         <p:spPr>
           <a:xfrm>
-            <a:off x="5233360" y="3568502"/>
-            <a:ext cx="6296860" cy="295275"/>
+            <a:off x="661475" y="3417689"/>
+            <a:ext cx="6296860" cy="286048"/>
           </a:xfrm>
           <a:prstGeom prst="rect">
             <a:avLst/>
@@ -2494,7 +2584,7 @@
               <a:buNone/>
             </a:pPr>
             <a:r>
-              <a:rPr lang="en-US" sz="1850" b="1" dirty="0">
+              <a:rPr lang="en-US" sz="1800" b="1" dirty="0">
                 <a:solidFill>
                   <a:srgbClr val="1C1C1C"/>
                 </a:solidFill>
@@ -2504,7 +2594,7 @@
               </a:rPr>
               <a:t>Apply the decision rule to your own nesting</a:t>
             </a:r>
-            <a:endParaRPr lang="en-US" sz="1850" dirty="0"/>
+            <a:endParaRPr lang="en-US" sz="1800" dirty="0"/>
           </a:p>
         </p:txBody>
       </p:sp>
@@ -2516,8 +2606,8 @@
         </p:nvSpPr>
         <p:spPr>
           <a:xfrm>
-            <a:off x="5233360" y="4194473"/>
-            <a:ext cx="378014" cy="236240"/>
+            <a:off x="661475" y="4018359"/>
+            <a:ext cx="366207" cy="228798"/>
           </a:xfrm>
           <a:prstGeom prst="rect">
             <a:avLst/>
@@ -2536,7 +2626,7 @@
               <a:buNone/>
             </a:pPr>
             <a:r>
-              <a:rPr lang="en-US" sz="1450" dirty="0">
+              <a:rPr lang="en-US" sz="1400" dirty="0">
                 <a:solidFill>
                   <a:srgbClr val="1C1C1C"/>
                 </a:solidFill>
@@ -2546,7 +2636,7 @@
               </a:rPr>
               <a:t>03</a:t>
             </a:r>
-            <a:endParaRPr lang="en-US" sz="1450" dirty="0"/>
+            <a:endParaRPr lang="en-US" sz="1400" dirty="0"/>
           </a:p>
         </p:txBody>
       </p:sp>
@@ -2558,7 +2648,7 @@
         </p:nvSpPr>
         <p:spPr>
           <a:xfrm>
-            <a:off x="5233360" y="4490343"/>
+            <a:off x="661475" y="4304109"/>
             <a:ext cx="6296860" cy="25400"/>
           </a:xfrm>
           <a:prstGeom prst="rect">
@@ -2578,8 +2668,8 @@
         </p:nvSpPr>
         <p:spPr>
           <a:xfrm>
-            <a:off x="5233360" y="4635599"/>
-            <a:ext cx="6296860" cy="295275"/>
+            <a:off x="661475" y="4446389"/>
+            <a:ext cx="6296860" cy="572095"/>
           </a:xfrm>
           <a:prstGeom prst="rect">
             <a:avLst/>
@@ -2588,7 +2678,9 @@
           <a:ln/>
         </p:spPr>
         <p:txBody>
-          <a:bodyPr wrap="none" lIns="0" tIns="0" rIns="0" bIns="0" rtlCol="0" anchor="t"/>
+          <a:bodyPr wrap="square" lIns="0" tIns="0" rIns="0" bIns="0" rtlCol="0" anchor="t">
+            <a:normAutofit/>
+          </a:bodyPr>
           <a:lstStyle/>
           <a:p>
             <a:pPr algn="l" indent="0" marL="0">
@@ -2598,7 +2690,7 @@
               <a:buNone/>
             </a:pPr>
             <a:r>
-              <a:rPr lang="en-US" sz="1850" b="1" dirty="0">
+              <a:rPr lang="en-US" sz="1800" b="1" dirty="0">
                 <a:solidFill>
                   <a:srgbClr val="1C1C1C"/>
                 </a:solidFill>
@@ -2606,9 +2698,9 @@
                 <a:ea typeface="Orbitron Bold" pitchFamily="34" charset="-122"/>
                 <a:cs typeface="Orbitron Bold" pitchFamily="34" charset="-120"/>
               </a:rPr>
-              <a:t>Build 2: Gate 2 review of AI code</a:t>
-            </a:r>
-            <a:endParaRPr lang="en-US" sz="1850" dirty="0"/>
+              <a:t>Build 2: run every decision table row against your engine</a:t>
+            </a:r>
+            <a:endParaRPr lang="en-US" sz="1800" dirty="0"/>
           </a:p>
         </p:txBody>
       </p:sp>
@@ -2620,8 +2712,8 @@
         </p:nvSpPr>
         <p:spPr>
           <a:xfrm>
-            <a:off x="5233360" y="5261570"/>
-            <a:ext cx="378014" cy="236240"/>
+            <a:off x="661475" y="5333107"/>
+            <a:ext cx="366207" cy="228798"/>
           </a:xfrm>
           <a:prstGeom prst="rect">
             <a:avLst/>
@@ -2640,7 +2732,7 @@
               <a:buNone/>
             </a:pPr>
             <a:r>
-              <a:rPr lang="en-US" sz="1450" dirty="0">
+              <a:rPr lang="en-US" sz="1400" dirty="0">
                 <a:solidFill>
                   <a:srgbClr val="1C1C1C"/>
                 </a:solidFill>
@@ -2650,7 +2742,7 @@
               </a:rPr>
               <a:t>04</a:t>
             </a:r>
-            <a:endParaRPr lang="en-US" sz="1450" dirty="0"/>
+            <a:endParaRPr lang="en-US" sz="1400" dirty="0"/>
           </a:p>
         </p:txBody>
       </p:sp>
@@ -2662,7 +2754,7 @@
         </p:nvSpPr>
         <p:spPr>
           <a:xfrm>
-            <a:off x="5233360" y="5557441"/>
+            <a:off x="661475" y="5618857"/>
             <a:ext cx="6296860" cy="25400"/>
           </a:xfrm>
           <a:prstGeom prst="rect">
@@ -2682,8 +2774,8 @@
         </p:nvSpPr>
         <p:spPr>
           <a:xfrm>
-            <a:off x="5233360" y="5702697"/>
-            <a:ext cx="6296860" cy="295275"/>
+            <a:off x="661475" y="5761137"/>
+            <a:ext cx="6296860" cy="286048"/>
           </a:xfrm>
           <a:prstGeom prst="rect">
             <a:avLst/>
@@ -2702,7 +2794,7 @@
               <a:buNone/>
             </a:pPr>
             <a:r>
-              <a:rPr lang="en-US" sz="1850" b="1" dirty="0">
+              <a:rPr lang="en-US" sz="1800" b="1" dirty="0">
                 <a:solidFill>
                   <a:srgbClr val="1C1C1C"/>
                 </a:solidFill>
@@ -2710,9 +2802,9 @@
                 <a:ea typeface="Orbitron Bold" pitchFamily="34" charset="-122"/>
                 <a:cs typeface="Orbitron Bold" pitchFamily="34" charset="-120"/>
               </a:rPr>
-              <a:t>It validates input, and it looks right</a:t>
-            </a:r>
-            <a:endParaRPr lang="en-US" sz="1850" dirty="0"/>
+              <a:t>Tomorrow: Gate 2 review of AI code</a:t>
+            </a:r>
+            <a:endParaRPr lang="en-US" sz="1800" dirty="0"/>
           </a:p>
         </p:txBody>
       </p:sp>
@@ -2724,7 +2816,7 @@
         </p:nvSpPr>
         <p:spPr>
           <a:xfrm>
-            <a:off x="4704141" y="6457255"/>
+            <a:off x="132255" y="6457255"/>
             <a:ext cx="3640642" cy="158750"/>
           </a:xfrm>
           <a:prstGeom prst="rect">
@@ -2799,7 +2891,7 @@
         </p:blipFill>
         <p:spPr>
           <a:xfrm>
-            <a:off x="7619809" y="0"/>
+            <a:off x="0" y="0"/>
             <a:ext cx="4571886" cy="6858000"/>
           </a:xfrm>
           <a:prstGeom prst="rect">
@@ -2815,7 +2907,7 @@
         </p:nvSpPr>
         <p:spPr>
           <a:xfrm>
-            <a:off x="661475" y="922338"/>
+            <a:off x="5233360" y="1217613"/>
             <a:ext cx="6296860" cy="1181298"/>
           </a:xfrm>
           <a:prstGeom prst="rect">
@@ -2851,45 +2943,42 @@
           </a:p>
         </p:txBody>
       </p:sp>
-      <p:pic>
-        <p:nvPicPr>
-          <p:cNvPr id="4" name="Image 1" descr="preencoded.png">    </p:cNvPr>
-          <p:cNvPicPr>
-            <a:picLocks noChangeAspect="1"/>
-          </p:cNvPicPr>
-          <p:nvPr/>
-        </p:nvPicPr>
-        <p:blipFill>
-          <a:blip r:embed="rId2">
-            <a:extLst>
-              <a:ext uri="{96DAC541-7B7A-43D3-8B79-37D633B846F1}">
-                <asvg:svgBlip xmlns:asvg="http://schemas.microsoft.com/office/drawing/2016/SVG/main" r:embed="rId3"/>
-              </a:ext>
-            </a:extLst>
-          </a:blip>
-          <a:stretch>
-            <a:fillRect/>
-          </a:stretch>
-        </p:blipFill>
-        <p:spPr>
-          <a:xfrm>
-            <a:off x="732315" y="2392958"/>
-            <a:ext cx="283461" cy="283468"/>
-          </a:xfrm>
-          <a:prstGeom prst="rect">
-            <a:avLst/>
-          </a:prstGeom>
-        </p:spPr>
-      </p:pic>
-      <p:sp>
-        <p:nvSpPr>
-          <p:cNvPr id="5" name="Text 1"/>
-          <p:cNvSpPr/>
-          <p:nvPr/>
-        </p:nvSpPr>
-        <p:spPr>
-          <a:xfrm>
-            <a:off x="1275723" y="2387104"/>
+      <p:sp>
+        <p:nvSpPr>
+          <p:cNvPr id="4" name="Shape 1"/>
+          <p:cNvSpPr/>
+          <p:nvPr/>
+        </p:nvSpPr>
+        <p:spPr>
+          <a:xfrm>
+            <a:off x="5233360" y="2682379"/>
+            <a:ext cx="425241" cy="425252"/>
+          </a:xfrm>
+          <a:prstGeom prst="roundRect">
+            <a:avLst>
+              <a:gd name="adj" fmla="val 18669"/>
+            </a:avLst>
+          </a:prstGeom>
+          <a:solidFill>
+            <a:srgbClr val="D1E5FA"/>
+          </a:solidFill>
+          <a:ln w="19050">
+            <a:solidFill>
+              <a:srgbClr val="B7CBE0"/>
+            </a:solidFill>
+            <a:prstDash val="solid"/>
+          </a:ln>
+        </p:spPr>
+      </p:sp>
+      <p:sp>
+        <p:nvSpPr>
+          <p:cNvPr id="5" name="Text 2"/>
+          <p:cNvSpPr/>
+          <p:nvPr/>
+        </p:nvSpPr>
+        <p:spPr>
+          <a:xfrm>
+            <a:off x="5847608" y="2747268"/>
             <a:ext cx="5682612" cy="295275"/>
           </a:xfrm>
           <a:prstGeom prst="rect">
@@ -2923,45 +3012,42 @@
           </a:p>
         </p:txBody>
       </p:sp>
-      <p:pic>
-        <p:nvPicPr>
-          <p:cNvPr id="6" name="Image 2" descr="preencoded.png">    </p:cNvPr>
-          <p:cNvPicPr>
-            <a:picLocks noChangeAspect="1"/>
-          </p:cNvPicPr>
-          <p:nvPr/>
-        </p:nvPicPr>
-        <p:blipFill>
-          <a:blip r:embed="rId4">
-            <a:extLst>
-              <a:ext uri="{96DAC541-7B7A-43D3-8B79-37D633B846F1}">
-                <asvg:svgBlip xmlns:asvg="http://schemas.microsoft.com/office/drawing/2016/SVG/main" r:embed="rId5"/>
-              </a:ext>
-            </a:extLst>
-          </a:blip>
-          <a:stretch>
-            <a:fillRect/>
-          </a:stretch>
-        </p:blipFill>
-        <p:spPr>
-          <a:xfrm>
-            <a:off x="732315" y="3343870"/>
-            <a:ext cx="283461" cy="283468"/>
-          </a:xfrm>
-          <a:prstGeom prst="rect">
-            <a:avLst/>
-          </a:prstGeom>
-        </p:spPr>
-      </p:pic>
-      <p:sp>
-        <p:nvSpPr>
-          <p:cNvPr id="7" name="Text 2"/>
-          <p:cNvSpPr/>
-          <p:nvPr/>
-        </p:nvSpPr>
-        <p:spPr>
-          <a:xfrm>
-            <a:off x="1275723" y="3338016"/>
+      <p:sp>
+        <p:nvSpPr>
+          <p:cNvPr id="6" name="Shape 3"/>
+          <p:cNvSpPr/>
+          <p:nvPr/>
+        </p:nvSpPr>
+        <p:spPr>
+          <a:xfrm>
+            <a:off x="5233360" y="3485654"/>
+            <a:ext cx="425241" cy="425252"/>
+          </a:xfrm>
+          <a:prstGeom prst="roundRect">
+            <a:avLst>
+              <a:gd name="adj" fmla="val 18669"/>
+            </a:avLst>
+          </a:prstGeom>
+          <a:solidFill>
+            <a:srgbClr val="D1E5FA"/>
+          </a:solidFill>
+          <a:ln w="19050">
+            <a:solidFill>
+              <a:srgbClr val="B7CBE0"/>
+            </a:solidFill>
+            <a:prstDash val="solid"/>
+          </a:ln>
+        </p:spPr>
+      </p:sp>
+      <p:sp>
+        <p:nvSpPr>
+          <p:cNvPr id="7" name="Text 4"/>
+          <p:cNvSpPr/>
+          <p:nvPr/>
+        </p:nvSpPr>
+        <p:spPr>
+          <a:xfrm>
+            <a:off x="5847608" y="3550543"/>
             <a:ext cx="5682612" cy="295275"/>
           </a:xfrm>
           <a:prstGeom prst="rect">
@@ -2995,45 +3081,42 @@
           </a:p>
         </p:txBody>
       </p:sp>
-      <p:pic>
-        <p:nvPicPr>
-          <p:cNvPr id="8" name="Image 3" descr="preencoded.png">    </p:cNvPr>
-          <p:cNvPicPr>
-            <a:picLocks noChangeAspect="1"/>
-          </p:cNvPicPr>
-          <p:nvPr/>
-        </p:nvPicPr>
-        <p:blipFill>
-          <a:blip r:embed="rId6">
-            <a:extLst>
-              <a:ext uri="{96DAC541-7B7A-43D3-8B79-37D633B846F1}">
-                <asvg:svgBlip xmlns:asvg="http://schemas.microsoft.com/office/drawing/2016/SVG/main" r:embed="rId7"/>
-              </a:ext>
-            </a:extLst>
-          </a:blip>
-          <a:stretch>
-            <a:fillRect/>
-          </a:stretch>
-        </p:blipFill>
-        <p:spPr>
-          <a:xfrm>
-            <a:off x="732315" y="4294783"/>
-            <a:ext cx="283461" cy="283468"/>
-          </a:xfrm>
-          <a:prstGeom prst="rect">
-            <a:avLst/>
-          </a:prstGeom>
-        </p:spPr>
-      </p:pic>
-      <p:sp>
-        <p:nvSpPr>
-          <p:cNvPr id="9" name="Text 3"/>
-          <p:cNvSpPr/>
-          <p:nvPr/>
-        </p:nvSpPr>
-        <p:spPr>
-          <a:xfrm>
-            <a:off x="1275723" y="4288929"/>
+      <p:sp>
+        <p:nvSpPr>
+          <p:cNvPr id="8" name="Shape 5"/>
+          <p:cNvSpPr/>
+          <p:nvPr/>
+        </p:nvSpPr>
+        <p:spPr>
+          <a:xfrm>
+            <a:off x="5233360" y="4288929"/>
+            <a:ext cx="425241" cy="425252"/>
+          </a:xfrm>
+          <a:prstGeom prst="roundRect">
+            <a:avLst>
+              <a:gd name="adj" fmla="val 18669"/>
+            </a:avLst>
+          </a:prstGeom>
+          <a:solidFill>
+            <a:srgbClr val="D1E5FA"/>
+          </a:solidFill>
+          <a:ln w="19050">
+            <a:solidFill>
+              <a:srgbClr val="B7CBE0"/>
+            </a:solidFill>
+            <a:prstDash val="solid"/>
+          </a:ln>
+        </p:spPr>
+      </p:sp>
+      <p:sp>
+        <p:nvSpPr>
+          <p:cNvPr id="9" name="Text 6"/>
+          <p:cNvSpPr/>
+          <p:nvPr/>
+        </p:nvSpPr>
+        <p:spPr>
+          <a:xfrm>
+            <a:off x="5847608" y="4353818"/>
             <a:ext cx="5682612" cy="295275"/>
           </a:xfrm>
           <a:prstGeom prst="rect">
@@ -3067,45 +3150,42 @@
           </a:p>
         </p:txBody>
       </p:sp>
-      <p:pic>
-        <p:nvPicPr>
-          <p:cNvPr id="10" name="Image 4" descr="preencoded.png">    </p:cNvPr>
-          <p:cNvPicPr>
-            <a:picLocks noChangeAspect="1"/>
-          </p:cNvPicPr>
-          <p:nvPr/>
-        </p:nvPicPr>
-        <p:blipFill>
-          <a:blip r:embed="rId8">
-            <a:extLst>
-              <a:ext uri="{96DAC541-7B7A-43D3-8B79-37D633B846F1}">
-                <asvg:svgBlip xmlns:asvg="http://schemas.microsoft.com/office/drawing/2016/SVG/main" r:embed="rId9"/>
-              </a:ext>
-            </a:extLst>
-          </a:blip>
-          <a:stretch>
-            <a:fillRect/>
-          </a:stretch>
-        </p:blipFill>
-        <p:spPr>
-          <a:xfrm>
-            <a:off x="732315" y="5245695"/>
-            <a:ext cx="283461" cy="283468"/>
-          </a:xfrm>
-          <a:prstGeom prst="rect">
-            <a:avLst/>
-          </a:prstGeom>
-        </p:spPr>
-      </p:pic>
-      <p:sp>
-        <p:nvSpPr>
-          <p:cNvPr id="11" name="Text 4"/>
-          <p:cNvSpPr/>
-          <p:nvPr/>
-        </p:nvSpPr>
-        <p:spPr>
-          <a:xfrm>
-            <a:off x="1275723" y="5239841"/>
+      <p:sp>
+        <p:nvSpPr>
+          <p:cNvPr id="10" name="Shape 7"/>
+          <p:cNvSpPr/>
+          <p:nvPr/>
+        </p:nvSpPr>
+        <p:spPr>
+          <a:xfrm>
+            <a:off x="5233360" y="5092204"/>
+            <a:ext cx="425241" cy="425252"/>
+          </a:xfrm>
+          <a:prstGeom prst="roundRect">
+            <a:avLst>
+              <a:gd name="adj" fmla="val 18669"/>
+            </a:avLst>
+          </a:prstGeom>
+          <a:solidFill>
+            <a:srgbClr val="D1E5FA"/>
+          </a:solidFill>
+          <a:ln w="19050">
+            <a:solidFill>
+              <a:srgbClr val="B7CBE0"/>
+            </a:solidFill>
+            <a:prstDash val="solid"/>
+          </a:ln>
+        </p:spPr>
+      </p:sp>
+      <p:sp>
+        <p:nvSpPr>
+          <p:cNvPr id="11" name="Text 8"/>
+          <p:cNvSpPr/>
+          <p:nvPr/>
+        </p:nvSpPr>
+        <p:spPr>
+          <a:xfrm>
+            <a:off x="5847608" y="5157093"/>
             <a:ext cx="5682612" cy="295275"/>
           </a:xfrm>
           <a:prstGeom prst="rect">
@@ -3141,13 +3221,13 @@
       </p:sp>
       <p:sp>
         <p:nvSpPr>
-          <p:cNvPr id="12" name="Text 5"/>
-          <p:cNvSpPr/>
-          <p:nvPr/>
-        </p:nvSpPr>
-        <p:spPr>
-          <a:xfrm>
-            <a:off x="132255" y="6457255"/>
+          <p:cNvPr id="12" name="Text 9"/>
+          <p:cNvSpPr/>
+          <p:nvPr/>
+        </p:nvSpPr>
+        <p:spPr>
+          <a:xfrm>
+            <a:off x="4704141" y="6457255"/>
             <a:ext cx="3640642" cy="158750"/>
           </a:xfrm>
           <a:prstGeom prst="rect">
@@ -4631,7 +4711,7 @@
         </p:blipFill>
         <p:spPr>
           <a:xfrm>
-            <a:off x="0" y="0"/>
+            <a:off x="7619809" y="0"/>
             <a:ext cx="4571886" cy="6858000"/>
           </a:xfrm>
           <a:prstGeom prst="rect">
@@ -4647,7 +4727,7 @@
         </p:nvSpPr>
         <p:spPr>
           <a:xfrm>
-            <a:off x="5233360" y="755848"/>
+            <a:off x="661475" y="755848"/>
             <a:ext cx="6296860" cy="590649"/>
           </a:xfrm>
           <a:prstGeom prst="rect">
@@ -4703,7 +4783,7 @@
         </p:blipFill>
         <p:spPr>
           <a:xfrm>
-            <a:off x="5233360" y="1629966"/>
+            <a:off x="661475" y="1629966"/>
             <a:ext cx="6296860" cy="724098"/>
           </a:xfrm>
           <a:prstGeom prst="rect">
@@ -4719,7 +4799,7 @@
         </p:nvSpPr>
         <p:spPr>
           <a:xfrm>
-            <a:off x="5549364" y="1844377"/>
+            <a:off x="977479" y="1844377"/>
             <a:ext cx="5766449" cy="295275"/>
           </a:xfrm>
           <a:prstGeom prst="rect">
@@ -4775,7 +4855,7 @@
         </p:blipFill>
         <p:spPr>
           <a:xfrm>
-            <a:off x="5233360" y="2543076"/>
+            <a:off x="661475" y="2543076"/>
             <a:ext cx="6296860" cy="1019373"/>
           </a:xfrm>
           <a:prstGeom prst="rect">
@@ -4791,7 +4871,7 @@
         </p:nvSpPr>
         <p:spPr>
           <a:xfrm>
-            <a:off x="5549364" y="2757488"/>
+            <a:off x="977479" y="2757488"/>
             <a:ext cx="5766449" cy="590550"/>
           </a:xfrm>
           <a:prstGeom prst="rect">
@@ -4849,7 +4929,7 @@
         </p:blipFill>
         <p:spPr>
           <a:xfrm>
-            <a:off x="5233360" y="3751461"/>
+            <a:off x="661475" y="3751461"/>
             <a:ext cx="6296860" cy="1019373"/>
           </a:xfrm>
           <a:prstGeom prst="rect">
@@ -4865,7 +4945,7 @@
         </p:nvSpPr>
         <p:spPr>
           <a:xfrm>
-            <a:off x="5549364" y="3965873"/>
+            <a:off x="977479" y="3965873"/>
             <a:ext cx="5766449" cy="590550"/>
           </a:xfrm>
           <a:prstGeom prst="rect">
@@ -4923,7 +5003,7 @@
         </p:blipFill>
         <p:spPr>
           <a:xfrm>
-            <a:off x="5233360" y="4959846"/>
+            <a:off x="661475" y="4959846"/>
             <a:ext cx="6296860" cy="1019373"/>
           </a:xfrm>
           <a:prstGeom prst="rect">
@@ -4939,7 +5019,7 @@
         </p:nvSpPr>
         <p:spPr>
           <a:xfrm>
-            <a:off x="5549364" y="5174258"/>
+            <a:off x="977479" y="5174258"/>
             <a:ext cx="5766449" cy="590550"/>
           </a:xfrm>
           <a:prstGeom prst="rect">
@@ -4983,7 +5063,7 @@
         </p:nvSpPr>
         <p:spPr>
           <a:xfrm>
-            <a:off x="4704141" y="6457255"/>
+            <a:off x="132255" y="6457255"/>
             <a:ext cx="3640642" cy="158750"/>
           </a:xfrm>
           <a:prstGeom prst="rect">
@@ -5411,7 +5491,7 @@
         </p:nvSpPr>
         <p:spPr>
           <a:xfrm>
-            <a:off x="661475" y="1064022"/>
+            <a:off x="661475" y="694928"/>
             <a:ext cx="10868745" cy="590649"/>
           </a:xfrm>
           <a:prstGeom prst="rect">
@@ -5445,42 +5525,45 @@
           </a:p>
         </p:txBody>
       </p:sp>
-      <p:sp>
-        <p:nvSpPr>
-          <p:cNvPr id="3" name="Shape 1"/>
-          <p:cNvSpPr/>
-          <p:nvPr/>
-        </p:nvSpPr>
-        <p:spPr>
-          <a:xfrm>
-            <a:off x="661475" y="2032695"/>
-            <a:ext cx="425241" cy="425252"/>
-          </a:xfrm>
-          <a:prstGeom prst="roundRect">
-            <a:avLst>
-              <a:gd name="adj" fmla="val 18669"/>
-            </a:avLst>
-          </a:prstGeom>
-          <a:solidFill>
-            <a:srgbClr val="D1E5FA"/>
-          </a:solidFill>
-          <a:ln w="19050">
-            <a:solidFill>
-              <a:srgbClr val="B7CBE0"/>
-            </a:solidFill>
-            <a:prstDash val="solid"/>
-          </a:ln>
-        </p:spPr>
-      </p:sp>
-      <p:sp>
-        <p:nvSpPr>
-          <p:cNvPr id="4" name="Text 2"/>
-          <p:cNvSpPr/>
-          <p:nvPr/>
-        </p:nvSpPr>
-        <p:spPr>
-          <a:xfrm>
-            <a:off x="1275723" y="2097584"/>
+      <p:pic>
+        <p:nvPicPr>
+          <p:cNvPr id="3" name="Image 0" descr="preencoded.png">    </p:cNvPr>
+          <p:cNvPicPr>
+            <a:picLocks noChangeAspect="1"/>
+          </p:cNvPicPr>
+          <p:nvPr/>
+        </p:nvPicPr>
+        <p:blipFill>
+          <a:blip r:embed="rId1">
+            <a:extLst>
+              <a:ext uri="{96DAC541-7B7A-43D3-8B79-37D633B846F1}">
+                <asvg:svgBlip xmlns:asvg="http://schemas.microsoft.com/office/drawing/2016/SVG/main" r:embed="rId2"/>
+              </a:ext>
+            </a:extLst>
+          </a:blip>
+          <a:stretch>
+            <a:fillRect/>
+          </a:stretch>
+        </p:blipFill>
+        <p:spPr>
+          <a:xfrm>
+            <a:off x="732315" y="1669455"/>
+            <a:ext cx="283461" cy="283468"/>
+          </a:xfrm>
+          <a:prstGeom prst="rect">
+            <a:avLst/>
+          </a:prstGeom>
+        </p:spPr>
+      </p:pic>
+      <p:sp>
+        <p:nvSpPr>
+          <p:cNvPr id="4" name="Text 1"/>
+          <p:cNvSpPr/>
+          <p:nvPr/>
+        </p:nvSpPr>
+        <p:spPr>
+          <a:xfrm>
+            <a:off x="1275723" y="1663601"/>
             <a:ext cx="10254497" cy="295275"/>
           </a:xfrm>
           <a:prstGeom prst="rect">
@@ -5514,42 +5597,45 @@
           </a:p>
         </p:txBody>
       </p:sp>
-      <p:sp>
-        <p:nvSpPr>
-          <p:cNvPr id="5" name="Shape 3"/>
-          <p:cNvSpPr/>
-          <p:nvPr/>
-        </p:nvSpPr>
-        <p:spPr>
-          <a:xfrm>
-            <a:off x="661475" y="2835970"/>
-            <a:ext cx="425241" cy="425252"/>
-          </a:xfrm>
-          <a:prstGeom prst="roundRect">
-            <a:avLst>
-              <a:gd name="adj" fmla="val 18669"/>
-            </a:avLst>
-          </a:prstGeom>
-          <a:solidFill>
-            <a:srgbClr val="D1E5FA"/>
-          </a:solidFill>
-          <a:ln w="19050">
-            <a:solidFill>
-              <a:srgbClr val="B7CBE0"/>
-            </a:solidFill>
-            <a:prstDash val="solid"/>
-          </a:ln>
-        </p:spPr>
-      </p:sp>
-      <p:sp>
-        <p:nvSpPr>
-          <p:cNvPr id="6" name="Text 4"/>
-          <p:cNvSpPr/>
-          <p:nvPr/>
-        </p:nvSpPr>
-        <p:spPr>
-          <a:xfrm>
-            <a:off x="1275723" y="2900859"/>
+      <p:pic>
+        <p:nvPicPr>
+          <p:cNvPr id="5" name="Image 1" descr="preencoded.png">    </p:cNvPr>
+          <p:cNvPicPr>
+            <a:picLocks noChangeAspect="1"/>
+          </p:cNvPicPr>
+          <p:nvPr/>
+        </p:nvPicPr>
+        <p:blipFill>
+          <a:blip r:embed="rId3">
+            <a:extLst>
+              <a:ext uri="{96DAC541-7B7A-43D3-8B79-37D633B846F1}">
+                <asvg:svgBlip xmlns:asvg="http://schemas.microsoft.com/office/drawing/2016/SVG/main" r:embed="rId4"/>
+              </a:ext>
+            </a:extLst>
+          </a:blip>
+          <a:stretch>
+            <a:fillRect/>
+          </a:stretch>
+        </p:blipFill>
+        <p:spPr>
+          <a:xfrm>
+            <a:off x="732315" y="2620367"/>
+            <a:ext cx="283461" cy="283468"/>
+          </a:xfrm>
+          <a:prstGeom prst="rect">
+            <a:avLst/>
+          </a:prstGeom>
+        </p:spPr>
+      </p:pic>
+      <p:sp>
+        <p:nvSpPr>
+          <p:cNvPr id="6" name="Text 2"/>
+          <p:cNvSpPr/>
+          <p:nvPr/>
+        </p:nvSpPr>
+        <p:spPr>
+          <a:xfrm>
+            <a:off x="1275723" y="2614513"/>
             <a:ext cx="10254497" cy="295275"/>
           </a:xfrm>
           <a:prstGeom prst="rect">
@@ -5583,42 +5669,45 @@
           </a:p>
         </p:txBody>
       </p:sp>
-      <p:sp>
-        <p:nvSpPr>
-          <p:cNvPr id="7" name="Shape 5"/>
-          <p:cNvSpPr/>
-          <p:nvPr/>
-        </p:nvSpPr>
-        <p:spPr>
-          <a:xfrm>
-            <a:off x="661475" y="3639245"/>
-            <a:ext cx="425241" cy="425252"/>
-          </a:xfrm>
-          <a:prstGeom prst="roundRect">
-            <a:avLst>
-              <a:gd name="adj" fmla="val 18669"/>
-            </a:avLst>
-          </a:prstGeom>
-          <a:solidFill>
-            <a:srgbClr val="D1E5FA"/>
-          </a:solidFill>
-          <a:ln w="19050">
-            <a:solidFill>
-              <a:srgbClr val="B7CBE0"/>
-            </a:solidFill>
-            <a:prstDash val="solid"/>
-          </a:ln>
-        </p:spPr>
-      </p:sp>
-      <p:sp>
-        <p:nvSpPr>
-          <p:cNvPr id="8" name="Text 6"/>
-          <p:cNvSpPr/>
-          <p:nvPr/>
-        </p:nvSpPr>
-        <p:spPr>
-          <a:xfrm>
-            <a:off x="1275723" y="3704134"/>
+      <p:pic>
+        <p:nvPicPr>
+          <p:cNvPr id="7" name="Image 2" descr="preencoded.png">    </p:cNvPr>
+          <p:cNvPicPr>
+            <a:picLocks noChangeAspect="1"/>
+          </p:cNvPicPr>
+          <p:nvPr/>
+        </p:nvPicPr>
+        <p:blipFill>
+          <a:blip r:embed="rId5">
+            <a:extLst>
+              <a:ext uri="{96DAC541-7B7A-43D3-8B79-37D633B846F1}">
+                <asvg:svgBlip xmlns:asvg="http://schemas.microsoft.com/office/drawing/2016/SVG/main" r:embed="rId6"/>
+              </a:ext>
+            </a:extLst>
+          </a:blip>
+          <a:stretch>
+            <a:fillRect/>
+          </a:stretch>
+        </p:blipFill>
+        <p:spPr>
+          <a:xfrm>
+            <a:off x="732315" y="3571280"/>
+            <a:ext cx="283461" cy="283468"/>
+          </a:xfrm>
+          <a:prstGeom prst="rect">
+            <a:avLst/>
+          </a:prstGeom>
+        </p:spPr>
+      </p:pic>
+      <p:sp>
+        <p:nvSpPr>
+          <p:cNvPr id="8" name="Text 3"/>
+          <p:cNvSpPr/>
+          <p:nvPr/>
+        </p:nvSpPr>
+        <p:spPr>
+          <a:xfrm>
+            <a:off x="1275723" y="3565426"/>
             <a:ext cx="10254497" cy="295275"/>
           </a:xfrm>
           <a:prstGeom prst="rect">
@@ -5652,42 +5741,45 @@
           </a:p>
         </p:txBody>
       </p:sp>
-      <p:sp>
-        <p:nvSpPr>
-          <p:cNvPr id="9" name="Shape 7"/>
-          <p:cNvSpPr/>
-          <p:nvPr/>
-        </p:nvSpPr>
-        <p:spPr>
-          <a:xfrm>
-            <a:off x="661475" y="4442520"/>
-            <a:ext cx="425241" cy="425252"/>
-          </a:xfrm>
-          <a:prstGeom prst="roundRect">
-            <a:avLst>
-              <a:gd name="adj" fmla="val 18669"/>
-            </a:avLst>
-          </a:prstGeom>
-          <a:solidFill>
-            <a:srgbClr val="D1E5FA"/>
-          </a:solidFill>
-          <a:ln w="19050">
-            <a:solidFill>
-              <a:srgbClr val="B7CBE0"/>
-            </a:solidFill>
-            <a:prstDash val="solid"/>
-          </a:ln>
-        </p:spPr>
-      </p:sp>
-      <p:sp>
-        <p:nvSpPr>
-          <p:cNvPr id="10" name="Text 8"/>
-          <p:cNvSpPr/>
-          <p:nvPr/>
-        </p:nvSpPr>
-        <p:spPr>
-          <a:xfrm>
-            <a:off x="1275723" y="4507409"/>
+      <p:pic>
+        <p:nvPicPr>
+          <p:cNvPr id="9" name="Image 3" descr="preencoded.png">    </p:cNvPr>
+          <p:cNvPicPr>
+            <a:picLocks noChangeAspect="1"/>
+          </p:cNvPicPr>
+          <p:nvPr/>
+        </p:nvPicPr>
+        <p:blipFill>
+          <a:blip r:embed="rId7">
+            <a:extLst>
+              <a:ext uri="{96DAC541-7B7A-43D3-8B79-37D633B846F1}">
+                <asvg:svgBlip xmlns:asvg="http://schemas.microsoft.com/office/drawing/2016/SVG/main" r:embed="rId8"/>
+              </a:ext>
+            </a:extLst>
+          </a:blip>
+          <a:stretch>
+            <a:fillRect/>
+          </a:stretch>
+        </p:blipFill>
+        <p:spPr>
+          <a:xfrm>
+            <a:off x="732315" y="4522192"/>
+            <a:ext cx="283461" cy="283468"/>
+          </a:xfrm>
+          <a:prstGeom prst="rect">
+            <a:avLst/>
+          </a:prstGeom>
+        </p:spPr>
+      </p:pic>
+      <p:sp>
+        <p:nvSpPr>
+          <p:cNvPr id="10" name="Text 4"/>
+          <p:cNvSpPr/>
+          <p:nvPr/>
+        </p:nvSpPr>
+        <p:spPr>
+          <a:xfrm>
+            <a:off x="1275723" y="4516338"/>
             <a:ext cx="10254497" cy="295275"/>
           </a:xfrm>
           <a:prstGeom prst="rect">
@@ -5721,42 +5813,45 @@
           </a:p>
         </p:txBody>
       </p:sp>
-      <p:sp>
-        <p:nvSpPr>
-          <p:cNvPr id="11" name="Shape 9"/>
-          <p:cNvSpPr/>
-          <p:nvPr/>
-        </p:nvSpPr>
-        <p:spPr>
-          <a:xfrm>
-            <a:off x="661475" y="5245795"/>
-            <a:ext cx="425241" cy="425252"/>
-          </a:xfrm>
-          <a:prstGeom prst="roundRect">
-            <a:avLst>
-              <a:gd name="adj" fmla="val 18669"/>
-            </a:avLst>
-          </a:prstGeom>
-          <a:solidFill>
-            <a:srgbClr val="D1E5FA"/>
-          </a:solidFill>
-          <a:ln w="19050">
-            <a:solidFill>
-              <a:srgbClr val="B7CBE0"/>
-            </a:solidFill>
-            <a:prstDash val="solid"/>
-          </a:ln>
-        </p:spPr>
-      </p:sp>
-      <p:sp>
-        <p:nvSpPr>
-          <p:cNvPr id="12" name="Text 10"/>
-          <p:cNvSpPr/>
-          <p:nvPr/>
-        </p:nvSpPr>
-        <p:spPr>
-          <a:xfrm>
-            <a:off x="1275723" y="5310684"/>
+      <p:pic>
+        <p:nvPicPr>
+          <p:cNvPr id="11" name="Image 4" descr="preencoded.png">    </p:cNvPr>
+          <p:cNvPicPr>
+            <a:picLocks noChangeAspect="1"/>
+          </p:cNvPicPr>
+          <p:nvPr/>
+        </p:nvPicPr>
+        <p:blipFill>
+          <a:blip r:embed="rId9">
+            <a:extLst>
+              <a:ext uri="{96DAC541-7B7A-43D3-8B79-37D633B846F1}">
+                <asvg:svgBlip xmlns:asvg="http://schemas.microsoft.com/office/drawing/2016/SVG/main" r:embed="rId10"/>
+              </a:ext>
+            </a:extLst>
+          </a:blip>
+          <a:stretch>
+            <a:fillRect/>
+          </a:stretch>
+        </p:blipFill>
+        <p:spPr>
+          <a:xfrm>
+            <a:off x="732315" y="5473105"/>
+            <a:ext cx="283461" cy="283468"/>
+          </a:xfrm>
+          <a:prstGeom prst="rect">
+            <a:avLst/>
+          </a:prstGeom>
+        </p:spPr>
+      </p:pic>
+      <p:sp>
+        <p:nvSpPr>
+          <p:cNvPr id="12" name="Text 5"/>
+          <p:cNvSpPr/>
+          <p:nvPr/>
+        </p:nvSpPr>
+        <p:spPr>
+          <a:xfrm>
+            <a:off x="1275723" y="5467251"/>
             <a:ext cx="10254497" cy="295275"/>
           </a:xfrm>
           <a:prstGeom prst="rect">
@@ -5792,7 +5887,7 @@
       </p:sp>
       <p:sp>
         <p:nvSpPr>
-          <p:cNvPr id="13" name="Text 11"/>
+          <p:cNvPr id="13" name="Text 6"/>
           <p:cNvSpPr/>
           <p:nvPr/>
         </p:nvSpPr>
